--- a/assets/pptx/catalog-561.pptx
+++ b/assets/pptx/catalog-561.pptx
@@ -3389,7 +3389,7 @@
                 <a:ea typeface="Ebrima"/>
                 <a:cs typeface="Ebrima"/>
               </a:rPr>
-              <a:t>አዎ አመልካለው ከፍ አደርገዋለሁ (2x)</a:t>
+              <a:t>አዎ አመልካለው ከፍ አደርገዋለሁ 2x</a:t>
             </a:r>
           </a:p>
         </p:txBody>
@@ -3474,7 +3474,7 @@
                 <a:ea typeface="Ebrima"/>
                 <a:cs typeface="Ebrima"/>
               </a:rPr>
-              <a:t>ሳይሳካ ነገሩ (2x)</a:t>
+              <a:t>ሳይሳካ ነገሩ 2x</a:t>
             </a:r>
           </a:p>
           <a:p>
@@ -3510,7 +3510,7 @@
                 <a:ea typeface="Ebrima"/>
                 <a:cs typeface="Ebrima"/>
               </a:rPr>
-              <a:t>ላመስግነው እግዚአብሔርን (2x)</a:t>
+              <a:t>ላመስግነው እግዚአብሔርን 2x</a:t>
             </a:r>
           </a:p>
         </p:txBody>
@@ -3577,7 +3577,7 @@
                 <a:ea typeface="Ebrima"/>
                 <a:cs typeface="Ebrima"/>
               </a:rPr>
-              <a:t>አመሰግናለሁ (8x)</a:t>
+              <a:t>አመሰግናለሁ 8x</a:t>
             </a:r>
           </a:p>
         </p:txBody>
@@ -3765,7 +3765,7 @@
                 <a:ea typeface="Ebrima"/>
                 <a:cs typeface="Ebrima"/>
               </a:rPr>
-              <a:t>አመሰግናለሁ (8x)</a:t>
+              <a:t>አመሰግናለሁ 8x</a:t>
             </a:r>
           </a:p>
         </p:txBody>
@@ -3971,7 +3971,7 @@
                 <a:ea typeface="Ebrima"/>
                 <a:cs typeface="Ebrima"/>
               </a:rPr>
-              <a:t>አዎ አመልካለው ከፍ አደርገዋለሁ (2x)</a:t>
+              <a:t>አዎ አመልካለው ከፍ አደርገዋለሁ 2x</a:t>
             </a:r>
           </a:p>
         </p:txBody>
@@ -4159,7 +4159,7 @@
                 <a:ea typeface="Ebrima"/>
                 <a:cs typeface="Ebrima"/>
               </a:rPr>
-              <a:t>አመሰግናለሁ (8x)</a:t>
+              <a:t>አመሰግናለሁ 8x</a:t>
             </a:r>
           </a:p>
         </p:txBody>
